--- a/record/current/worm_v6_advisor_update_ppt/worm_v6_advisor_update_20260603_v95.pptx
+++ b/record/current/worm_v6_advisor_update_ppt/worm_v6_advisor_update_20260603_v95.pptx
@@ -23,6 +23,7 @@
     <p:sldId id="271" r:id="rId22"/>
     <p:sldId id="272" r:id="rId23"/>
     <p:sldId id="273" r:id="rId24"/>
+    <p:sldId id="274" r:id="rId25"/>
   </p:sldIdLst>
   <p:sldSz cx="12191695" cy="6858000" type="screen4x3"/>
   <p:notesSz cx="6858000" cy="9144000"/>
@@ -6975,7 +6976,7 @@
                 </a:solidFill>
                 <a:latin typeface="Microsoft YaHei"/>
               </a:rPr>
-              <a:t>已有论文怎么训练：主流路线是 gait/CPG prior + RL 调制</a:t>
+              <a:t>V95 结果审计：投影方向改善，但 mixed vx/vy 分量仍未学会</a:t>
             </a:r>
           </a:p>
         </p:txBody>
@@ -7010,7 +7011,7 @@
                 </a:solidFill>
                 <a:latin typeface="Microsoft YaHei"/>
               </a:rPr>
-              <a:t>这支持我们当前的 prior + residual + learned gait gate，而不是端到端裸输出所有电机。</a:t>
+              <a:t>旧 analyzer 会把 final robust 判为 accepted；新增分量符号 gate 后，V95 仍失败。</a:t>
             </a:r>
           </a:p>
         </p:txBody>
@@ -7060,6 +7061,1082 @@
           </a:p>
         </p:txBody>
       </p:sp>
+      <p:sp>
+        <p:nvSpPr>
+          <p:cNvPr id="5" name="Rounded Rectangle 4"/>
+          <p:cNvSpPr/>
+          <p:nvPr/>
+        </p:nvSpPr>
+        <p:spPr>
+          <a:xfrm>
+            <a:off x="502920" y="1078992"/>
+            <a:ext cx="11201400" cy="4160520"/>
+          </a:xfrm>
+          <a:prstGeom prst="roundRect">
+            <a:avLst/>
+          </a:prstGeom>
+          <a:solidFill>
+            <a:srgbClr val="F5F7F8"/>
+          </a:solidFill>
+          <a:ln>
+            <a:solidFill>
+              <a:srgbClr val="D2D8DC"/>
+            </a:solidFill>
+          </a:ln>
+        </p:spPr>
+        <p:style>
+          <a:lnRef idx="1">
+            <a:schemeClr val="accent1"/>
+          </a:lnRef>
+          <a:fillRef idx="3">
+            <a:schemeClr val="accent1"/>
+          </a:fillRef>
+          <a:effectRef idx="2">
+            <a:schemeClr val="accent1"/>
+          </a:effectRef>
+          <a:fontRef idx="minor">
+            <a:schemeClr val="lt1"/>
+          </a:fontRef>
+        </p:style>
+        <p:txBody>
+          <a:bodyPr rtlCol="0" anchor="ctr"/>
+          <a:lstStyle/>
+          <a:p>
+            <a:pPr algn="ctr"/>
+          </a:p>
+        </p:txBody>
+      </p:sp>
+      <p:graphicFrame>
+        <p:nvGraphicFramePr>
+          <p:cNvPr id="6" name="Table 5"/>
+          <p:cNvGraphicFramePr>
+            <a:graphicFrameLocks noGrp="1"/>
+          </p:cNvGraphicFramePr>
+          <p:nvPr/>
+        </p:nvGraphicFramePr>
+        <p:xfrm>
+          <a:off x="777240" y="1417320"/>
+          <a:ext cx="10652760" cy="2514600"/>
+        </p:xfrm>
+        <a:graphic>
+          <a:graphicData uri="http://schemas.openxmlformats.org/drawingml/2006/table">
+            <a:tbl>
+              <a:tblPr firstRow="1" bandRow="1">
+                <a:tableStyleId>{5C22544A-7EE6-4342-B048-85BDC9FD1C3A}</a:tableStyleId>
+              </a:tblPr>
+              <a:tblGrid>
+                <a:gridCol w="1775460"/>
+                <a:gridCol w="1775460"/>
+                <a:gridCol w="1775460"/>
+                <a:gridCol w="1775460"/>
+                <a:gridCol w="1775460"/>
+                <a:gridCol w="1775460"/>
+              </a:tblGrid>
+              <a:tr h="502920">
+                <a:tc>
+                  <a:txBody>
+                    <a:bodyPr/>
+                    <a:lstStyle/>
+                    <a:p>
+                      <a:pPr>
+                        <a:defRPr sz="700" b="1">
+                          <a:solidFill>
+                            <a:srgbClr val="191F24"/>
+                          </a:solidFill>
+                          <a:latin typeface="Microsoft YaHei"/>
+                        </a:defRPr>
+                      </a:pPr>
+                      <a:r>
+                        <a:t>checkpoint</a:t>
+                      </a:r>
+                    </a:p>
+                  </a:txBody>
+                  <a:tcPr>
+                    <a:solidFill>
+                      <a:srgbClr val="E7EEF5"/>
+                    </a:solidFill>
+                  </a:tcPr>
+                </a:tc>
+                <a:tc>
+                  <a:txBody>
+                    <a:bodyPr/>
+                    <a:lstStyle/>
+                    <a:p>
+                      <a:pPr>
+                        <a:defRPr sz="700" b="1">
+                          <a:solidFill>
+                            <a:srgbClr val="191F24"/>
+                          </a:solidFill>
+                          <a:latin typeface="Microsoft YaHei"/>
+                        </a:defRPr>
+                      </a:pPr>
+                      <a:r>
+                        <a:t>accepted</a:t>
+                      </a:r>
+                    </a:p>
+                  </a:txBody>
+                  <a:tcPr>
+                    <a:solidFill>
+                      <a:srgbClr val="E7EEF5"/>
+                    </a:solidFill>
+                  </a:tcPr>
+                </a:tc>
+                <a:tc>
+                  <a:txBody>
+                    <a:bodyPr/>
+                    <a:lstStyle/>
+                    <a:p>
+                      <a:pPr>
+                        <a:defRPr sz="700" b="1">
+                          <a:solidFill>
+                            <a:srgbClr val="191F24"/>
+                          </a:solidFill>
+                          <a:latin typeface="Microsoft YaHei"/>
+                        </a:defRPr>
+                      </a:pPr>
+                      <a:r>
+                        <a:t>planar RMSE</a:t>
+                      </a:r>
+                    </a:p>
+                  </a:txBody>
+                  <a:tcPr>
+                    <a:solidFill>
+                      <a:srgbClr val="E7EEF5"/>
+                    </a:solidFill>
+                  </a:tcPr>
+                </a:tc>
+                <a:tc>
+                  <a:txBody>
+                    <a:bodyPr/>
+                    <a:lstStyle/>
+                    <a:p>
+                      <a:pPr>
+                        <a:defRPr sz="700" b="1">
+                          <a:solidFill>
+                            <a:srgbClr val="191F24"/>
+                          </a:solidFill>
+                          <a:latin typeface="Microsoft YaHei"/>
+                        </a:defRPr>
+                      </a:pPr>
+                      <a:r>
+                        <a:t>yaw RMSE</a:t>
+                      </a:r>
+                    </a:p>
+                  </a:txBody>
+                  <a:tcPr>
+                    <a:solidFill>
+                      <a:srgbClr val="E7EEF5"/>
+                    </a:solidFill>
+                  </a:tcPr>
+                </a:tc>
+                <a:tc>
+                  <a:txBody>
+                    <a:bodyPr/>
+                    <a:lstStyle/>
+                    <a:p>
+                      <a:pPr>
+                        <a:defRPr sz="700" b="1">
+                          <a:solidFill>
+                            <a:srgbClr val="191F24"/>
+                          </a:solidFill>
+                          <a:latin typeface="Microsoft YaHei"/>
+                        </a:defRPr>
+                      </a:pPr>
+                      <a:r>
+                        <a:t>wrong mixed comp</a:t>
+                      </a:r>
+                    </a:p>
+                  </a:txBody>
+                  <a:tcPr>
+                    <a:solidFill>
+                      <a:srgbClr val="E7EEF5"/>
+                    </a:solidFill>
+                  </a:tcPr>
+                </a:tc>
+                <a:tc>
+                  <a:txBody>
+                    <a:bodyPr/>
+                    <a:lstStyle/>
+                    <a:p>
+                      <a:pPr>
+                        <a:defRPr sz="700" b="1">
+                          <a:solidFill>
+                            <a:srgbClr val="191F24"/>
+                          </a:solidFill>
+                          <a:latin typeface="Microsoft YaHei"/>
+                        </a:defRPr>
+                      </a:pPr>
+                      <a:r>
+                        <a:t>representative component failure</a:t>
+                      </a:r>
+                    </a:p>
+                  </a:txBody>
+                  <a:tcPr>
+                    <a:solidFill>
+                      <a:srgbClr val="E7EEF5"/>
+                    </a:solidFill>
+                  </a:tcPr>
+                </a:tc>
+              </a:tr>
+              <a:tr h="502920">
+                <a:tc>
+                  <a:txBody>
+                    <a:bodyPr/>
+                    <a:lstStyle/>
+                    <a:p>
+                      <a:pPr>
+                        <a:defRPr sz="700">
+                          <a:solidFill>
+                            <a:srgbClr val="191F24"/>
+                          </a:solidFill>
+                          <a:latin typeface="Microsoft YaHei"/>
+                        </a:defRPr>
+                      </a:pPr>
+                      <a:r>
+                        <a:t>best nominal</a:t>
+                      </a:r>
+                    </a:p>
+                  </a:txBody>
+                  <a:tcPr>
+                    <a:solidFill>
+                      <a:srgbClr val="FFFFFF"/>
+                    </a:solidFill>
+                  </a:tcPr>
+                </a:tc>
+                <a:tc>
+                  <a:txBody>
+                    <a:bodyPr/>
+                    <a:lstStyle/>
+                    <a:p>
+                      <a:pPr>
+                        <a:defRPr sz="700">
+                          <a:solidFill>
+                            <a:srgbClr val="191F24"/>
+                          </a:solidFill>
+                          <a:latin typeface="Microsoft YaHei"/>
+                        </a:defRPr>
+                      </a:pPr>
+                      <a:r>
+                        <a:t>false</a:t>
+                      </a:r>
+                    </a:p>
+                  </a:txBody>
+                  <a:tcPr>
+                    <a:solidFill>
+                      <a:srgbClr val="FFFFFF"/>
+                    </a:solidFill>
+                  </a:tcPr>
+                </a:tc>
+                <a:tc>
+                  <a:txBody>
+                    <a:bodyPr/>
+                    <a:lstStyle/>
+                    <a:p>
+                      <a:pPr>
+                        <a:defRPr sz="700">
+                          <a:solidFill>
+                            <a:srgbClr val="191F24"/>
+                          </a:solidFill>
+                          <a:latin typeface="Microsoft YaHei"/>
+                        </a:defRPr>
+                      </a:pPr>
+                      <a:r>
+                        <a:t>0.0547</a:t>
+                      </a:r>
+                    </a:p>
+                  </a:txBody>
+                  <a:tcPr>
+                    <a:solidFill>
+                      <a:srgbClr val="FFFFFF"/>
+                    </a:solidFill>
+                  </a:tcPr>
+                </a:tc>
+                <a:tc>
+                  <a:txBody>
+                    <a:bodyPr/>
+                    <a:lstStyle/>
+                    <a:p>
+                      <a:pPr>
+                        <a:defRPr sz="700">
+                          <a:solidFill>
+                            <a:srgbClr val="191F24"/>
+                          </a:solidFill>
+                          <a:latin typeface="Microsoft YaHei"/>
+                        </a:defRPr>
+                      </a:pPr>
+                      <a:r>
+                        <a:t>0.0217</a:t>
+                      </a:r>
+                    </a:p>
+                  </a:txBody>
+                  <a:tcPr>
+                    <a:solidFill>
+                      <a:srgbClr val="FFFFFF"/>
+                    </a:solidFill>
+                  </a:tcPr>
+                </a:tc>
+                <a:tc>
+                  <a:txBody>
+                    <a:bodyPr/>
+                    <a:lstStyle/>
+                    <a:p>
+                      <a:pPr>
+                        <a:defRPr sz="700">
+                          <a:solidFill>
+                            <a:srgbClr val="191F24"/>
+                          </a:solidFill>
+                          <a:latin typeface="Microsoft YaHei"/>
+                        </a:defRPr>
+                      </a:pPr>
+                      <a:r>
+                        <a:t>7</a:t>
+                      </a:r>
+                    </a:p>
+                  </a:txBody>
+                  <a:tcPr>
+                    <a:solidFill>
+                      <a:srgbClr val="FFFFFF"/>
+                    </a:solidFill>
+                  </a:tcPr>
+                </a:tc>
+                <a:tc>
+                  <a:txBody>
+                    <a:bodyPr/>
+                    <a:lstStyle/>
+                    <a:p>
+                      <a:pPr>
+                        <a:defRPr sz="700">
+                          <a:solidFill>
+                            <a:srgbClr val="191F24"/>
+                          </a:solidFill>
+                          <a:latin typeface="Microsoft YaHei"/>
+                        </a:defRPr>
+                      </a:pPr>
+                      <a:r>
+                        <a:t>(+0.05,+0.075,0)-&gt;(-0.0229,+0.0578,+0.1136)</a:t>
+                      </a:r>
+                    </a:p>
+                  </a:txBody>
+                  <a:tcPr>
+                    <a:solidFill>
+                      <a:srgbClr val="FFFFFF"/>
+                    </a:solidFill>
+                  </a:tcPr>
+                </a:tc>
+              </a:tr>
+              <a:tr h="502920">
+                <a:tc>
+                  <a:txBody>
+                    <a:bodyPr/>
+                    <a:lstStyle/>
+                    <a:p>
+                      <a:pPr>
+                        <a:defRPr sz="700">
+                          <a:solidFill>
+                            <a:srgbClr val="191F24"/>
+                          </a:solidFill>
+                          <a:latin typeface="Microsoft YaHei"/>
+                        </a:defRPr>
+                      </a:pPr>
+                      <a:r>
+                        <a:t>best robust</a:t>
+                      </a:r>
+                    </a:p>
+                  </a:txBody>
+                  <a:tcPr>
+                    <a:solidFill>
+                      <a:srgbClr val="FFFFFF"/>
+                    </a:solidFill>
+                  </a:tcPr>
+                </a:tc>
+                <a:tc>
+                  <a:txBody>
+                    <a:bodyPr/>
+                    <a:lstStyle/>
+                    <a:p>
+                      <a:pPr>
+                        <a:defRPr sz="700">
+                          <a:solidFill>
+                            <a:srgbClr val="191F24"/>
+                          </a:solidFill>
+                          <a:latin typeface="Microsoft YaHei"/>
+                        </a:defRPr>
+                      </a:pPr>
+                      <a:r>
+                        <a:t>false</a:t>
+                      </a:r>
+                    </a:p>
+                  </a:txBody>
+                  <a:tcPr>
+                    <a:solidFill>
+                      <a:srgbClr val="FFFFFF"/>
+                    </a:solidFill>
+                  </a:tcPr>
+                </a:tc>
+                <a:tc>
+                  <a:txBody>
+                    <a:bodyPr/>
+                    <a:lstStyle/>
+                    <a:p>
+                      <a:pPr>
+                        <a:defRPr sz="700">
+                          <a:solidFill>
+                            <a:srgbClr val="191F24"/>
+                          </a:solidFill>
+                          <a:latin typeface="Microsoft YaHei"/>
+                        </a:defRPr>
+                      </a:pPr>
+                      <a:r>
+                        <a:t>0.0570</a:t>
+                      </a:r>
+                    </a:p>
+                  </a:txBody>
+                  <a:tcPr>
+                    <a:solidFill>
+                      <a:srgbClr val="FFFFFF"/>
+                    </a:solidFill>
+                  </a:tcPr>
+                </a:tc>
+                <a:tc>
+                  <a:txBody>
+                    <a:bodyPr/>
+                    <a:lstStyle/>
+                    <a:p>
+                      <a:pPr>
+                        <a:defRPr sz="700">
+                          <a:solidFill>
+                            <a:srgbClr val="191F24"/>
+                          </a:solidFill>
+                          <a:latin typeface="Microsoft YaHei"/>
+                        </a:defRPr>
+                      </a:pPr>
+                      <a:r>
+                        <a:t>0.0201</a:t>
+                      </a:r>
+                    </a:p>
+                  </a:txBody>
+                  <a:tcPr>
+                    <a:solidFill>
+                      <a:srgbClr val="FFFFFF"/>
+                    </a:solidFill>
+                  </a:tcPr>
+                </a:tc>
+                <a:tc>
+                  <a:txBody>
+                    <a:bodyPr/>
+                    <a:lstStyle/>
+                    <a:p>
+                      <a:pPr>
+                        <a:defRPr sz="700">
+                          <a:solidFill>
+                            <a:srgbClr val="191F24"/>
+                          </a:solidFill>
+                          <a:latin typeface="Microsoft YaHei"/>
+                        </a:defRPr>
+                      </a:pPr>
+                      <a:r>
+                        <a:t>8</a:t>
+                      </a:r>
+                    </a:p>
+                  </a:txBody>
+                  <a:tcPr>
+                    <a:solidFill>
+                      <a:srgbClr val="FFFFFF"/>
+                    </a:solidFill>
+                  </a:tcPr>
+                </a:tc>
+                <a:tc>
+                  <a:txBody>
+                    <a:bodyPr/>
+                    <a:lstStyle/>
+                    <a:p>
+                      <a:pPr>
+                        <a:defRPr sz="700">
+                          <a:solidFill>
+                            <a:srgbClr val="191F24"/>
+                          </a:solidFill>
+                          <a:latin typeface="Microsoft YaHei"/>
+                        </a:defRPr>
+                      </a:pPr>
+                      <a:r>
+                        <a:t>(+0.05,+0.075,0)-&gt;(-0.0345,+0.0059,+0.0113)</a:t>
+                      </a:r>
+                    </a:p>
+                  </a:txBody>
+                  <a:tcPr>
+                    <a:solidFill>
+                      <a:srgbClr val="FFFFFF"/>
+                    </a:solidFill>
+                  </a:tcPr>
+                </a:tc>
+              </a:tr>
+              <a:tr h="502920">
+                <a:tc>
+                  <a:txBody>
+                    <a:bodyPr/>
+                    <a:lstStyle/>
+                    <a:p>
+                      <a:pPr>
+                        <a:defRPr sz="700">
+                          <a:solidFill>
+                            <a:srgbClr val="191F24"/>
+                          </a:solidFill>
+                          <a:latin typeface="Microsoft YaHei"/>
+                        </a:defRPr>
+                      </a:pPr>
+                      <a:r>
+                        <a:t>final nominal</a:t>
+                      </a:r>
+                    </a:p>
+                  </a:txBody>
+                  <a:tcPr>
+                    <a:solidFill>
+                      <a:srgbClr val="FFFFFF"/>
+                    </a:solidFill>
+                  </a:tcPr>
+                </a:tc>
+                <a:tc>
+                  <a:txBody>
+                    <a:bodyPr/>
+                    <a:lstStyle/>
+                    <a:p>
+                      <a:pPr>
+                        <a:defRPr sz="700">
+                          <a:solidFill>
+                            <a:srgbClr val="191F24"/>
+                          </a:solidFill>
+                          <a:latin typeface="Microsoft YaHei"/>
+                        </a:defRPr>
+                      </a:pPr>
+                      <a:r>
+                        <a:t>false</a:t>
+                      </a:r>
+                    </a:p>
+                  </a:txBody>
+                  <a:tcPr>
+                    <a:solidFill>
+                      <a:srgbClr val="FFFFFF"/>
+                    </a:solidFill>
+                  </a:tcPr>
+                </a:tc>
+                <a:tc>
+                  <a:txBody>
+                    <a:bodyPr/>
+                    <a:lstStyle/>
+                    <a:p>
+                      <a:pPr>
+                        <a:defRPr sz="700">
+                          <a:solidFill>
+                            <a:srgbClr val="191F24"/>
+                          </a:solidFill>
+                          <a:latin typeface="Microsoft YaHei"/>
+                        </a:defRPr>
+                      </a:pPr>
+                      <a:r>
+                        <a:t>0.0572</a:t>
+                      </a:r>
+                    </a:p>
+                  </a:txBody>
+                  <a:tcPr>
+                    <a:solidFill>
+                      <a:srgbClr val="FFFFFF"/>
+                    </a:solidFill>
+                  </a:tcPr>
+                </a:tc>
+                <a:tc>
+                  <a:txBody>
+                    <a:bodyPr/>
+                    <a:lstStyle/>
+                    <a:p>
+                      <a:pPr>
+                        <a:defRPr sz="700">
+                          <a:solidFill>
+                            <a:srgbClr val="191F24"/>
+                          </a:solidFill>
+                          <a:latin typeface="Microsoft YaHei"/>
+                        </a:defRPr>
+                      </a:pPr>
+                      <a:r>
+                        <a:t>0.0218</a:t>
+                      </a:r>
+                    </a:p>
+                  </a:txBody>
+                  <a:tcPr>
+                    <a:solidFill>
+                      <a:srgbClr val="FFFFFF"/>
+                    </a:solidFill>
+                  </a:tcPr>
+                </a:tc>
+                <a:tc>
+                  <a:txBody>
+                    <a:bodyPr/>
+                    <a:lstStyle/>
+                    <a:p>
+                      <a:pPr>
+                        <a:defRPr sz="700">
+                          <a:solidFill>
+                            <a:srgbClr val="191F24"/>
+                          </a:solidFill>
+                          <a:latin typeface="Microsoft YaHei"/>
+                        </a:defRPr>
+                      </a:pPr>
+                      <a:r>
+                        <a:t>11</a:t>
+                      </a:r>
+                    </a:p>
+                  </a:txBody>
+                  <a:tcPr>
+                    <a:solidFill>
+                      <a:srgbClr val="FFFFFF"/>
+                    </a:solidFill>
+                  </a:tcPr>
+                </a:tc>
+                <a:tc>
+                  <a:txBody>
+                    <a:bodyPr/>
+                    <a:lstStyle/>
+                    <a:p>
+                      <a:pPr>
+                        <a:defRPr sz="700">
+                          <a:solidFill>
+                            <a:srgbClr val="191F24"/>
+                          </a:solidFill>
+                          <a:latin typeface="Microsoft YaHei"/>
+                        </a:defRPr>
+                      </a:pPr>
+                      <a:r>
+                        <a:t>(+0.05,+0.075,0)-&gt;(-0.0267,+0.0516,+0.0851)</a:t>
+                      </a:r>
+                    </a:p>
+                  </a:txBody>
+                  <a:tcPr>
+                    <a:solidFill>
+                      <a:srgbClr val="FFFFFF"/>
+                    </a:solidFill>
+                  </a:tcPr>
+                </a:tc>
+              </a:tr>
+              <a:tr h="502920">
+                <a:tc>
+                  <a:txBody>
+                    <a:bodyPr/>
+                    <a:lstStyle/>
+                    <a:p>
+                      <a:pPr>
+                        <a:defRPr sz="700">
+                          <a:solidFill>
+                            <a:srgbClr val="191F24"/>
+                          </a:solidFill>
+                          <a:latin typeface="Microsoft YaHei"/>
+                        </a:defRPr>
+                      </a:pPr>
+                      <a:r>
+                        <a:t>final robust</a:t>
+                      </a:r>
+                    </a:p>
+                  </a:txBody>
+                  <a:tcPr>
+                    <a:solidFill>
+                      <a:srgbClr val="FFFFFF"/>
+                    </a:solidFill>
+                  </a:tcPr>
+                </a:tc>
+                <a:tc>
+                  <a:txBody>
+                    <a:bodyPr/>
+                    <a:lstStyle/>
+                    <a:p>
+                      <a:pPr>
+                        <a:defRPr sz="700">
+                          <a:solidFill>
+                            <a:srgbClr val="191F24"/>
+                          </a:solidFill>
+                          <a:latin typeface="Microsoft YaHei"/>
+                        </a:defRPr>
+                      </a:pPr>
+                      <a:r>
+                        <a:t>false</a:t>
+                      </a:r>
+                    </a:p>
+                  </a:txBody>
+                  <a:tcPr>
+                    <a:solidFill>
+                      <a:srgbClr val="FFFFFF"/>
+                    </a:solidFill>
+                  </a:tcPr>
+                </a:tc>
+                <a:tc>
+                  <a:txBody>
+                    <a:bodyPr/>
+                    <a:lstStyle/>
+                    <a:p>
+                      <a:pPr>
+                        <a:defRPr sz="700">
+                          <a:solidFill>
+                            <a:srgbClr val="191F24"/>
+                          </a:solidFill>
+                          <a:latin typeface="Microsoft YaHei"/>
+                        </a:defRPr>
+                      </a:pPr>
+                      <a:r>
+                        <a:t>0.0616</a:t>
+                      </a:r>
+                    </a:p>
+                  </a:txBody>
+                  <a:tcPr>
+                    <a:solidFill>
+                      <a:srgbClr val="FFFFFF"/>
+                    </a:solidFill>
+                  </a:tcPr>
+                </a:tc>
+                <a:tc>
+                  <a:txBody>
+                    <a:bodyPr/>
+                    <a:lstStyle/>
+                    <a:p>
+                      <a:pPr>
+                        <a:defRPr sz="700">
+                          <a:solidFill>
+                            <a:srgbClr val="191F24"/>
+                          </a:solidFill>
+                          <a:latin typeface="Microsoft YaHei"/>
+                        </a:defRPr>
+                      </a:pPr>
+                      <a:r>
+                        <a:t>0.0201</a:t>
+                      </a:r>
+                    </a:p>
+                  </a:txBody>
+                  <a:tcPr>
+                    <a:solidFill>
+                      <a:srgbClr val="FFFFFF"/>
+                    </a:solidFill>
+                  </a:tcPr>
+                </a:tc>
+                <a:tc>
+                  <a:txBody>
+                    <a:bodyPr/>
+                    <a:lstStyle/>
+                    <a:p>
+                      <a:pPr>
+                        <a:defRPr sz="700">
+                          <a:solidFill>
+                            <a:srgbClr val="191F24"/>
+                          </a:solidFill>
+                          <a:latin typeface="Microsoft YaHei"/>
+                        </a:defRPr>
+                      </a:pPr>
+                      <a:r>
+                        <a:t>10</a:t>
+                      </a:r>
+                    </a:p>
+                  </a:txBody>
+                  <a:tcPr>
+                    <a:solidFill>
+                      <a:srgbClr val="FFFFFF"/>
+                    </a:solidFill>
+                  </a:tcPr>
+                </a:tc>
+                <a:tc>
+                  <a:txBody>
+                    <a:bodyPr/>
+                    <a:lstStyle/>
+                    <a:p>
+                      <a:pPr>
+                        <a:defRPr sz="700">
+                          <a:solidFill>
+                            <a:srgbClr val="191F24"/>
+                          </a:solidFill>
+                          <a:latin typeface="Microsoft YaHei"/>
+                        </a:defRPr>
+                      </a:pPr>
+                      <a:r>
+                        <a:t>(-0.10,+0.075,0)-&gt;(-0.0605,-0.0338,-0.0882)</a:t>
+                      </a:r>
+                    </a:p>
+                  </a:txBody>
+                  <a:tcPr>
+                    <a:solidFill>
+                      <a:srgbClr val="FFFFFF"/>
+                    </a:solidFill>
+                  </a:tcPr>
+                </a:tc>
+              </a:tr>
+            </a:tbl>
+          </a:graphicData>
+        </a:graphic>
+      </p:graphicFrame>
+      <p:sp>
+        <p:nvSpPr>
+          <p:cNvPr id="7" name="TextBox 6"/>
+          <p:cNvSpPr txBox="1"/>
+          <p:nvPr/>
+        </p:nvSpPr>
+        <p:spPr>
+          <a:xfrm>
+            <a:off x="777240" y="4160520"/>
+            <a:ext cx="10241280" cy="960120"/>
+          </a:xfrm>
+          <a:prstGeom prst="rect">
+            <a:avLst/>
+          </a:prstGeom>
+          <a:noFill/>
+        </p:spPr>
+        <p:txBody>
+          <a:bodyPr wrap="square">
+            <a:spAutoFit/>
+          </a:bodyPr>
+          <a:lstStyle/>
+          <a:p>
+            <a:pPr>
+              <a:spcAft>
+                <a:spcPts val="288"/>
+              </a:spcAft>
+              <a:defRPr sz="1200">
+                <a:solidFill>
+                  <a:srgbClr val="191F24"/>
+                </a:solidFill>
+                <a:latin typeface="Microsoft YaHei"/>
+              </a:defRPr>
+            </a:pPr>
+            <a:r>
+              <a:t>V95 的真实进步：final checkpoint 在旧投影方向 gate 下 robust 扫描不再有 wrong planar/yaw。</a:t>
+            </a:r>
+          </a:p>
+          <a:p>
+            <a:pPr>
+              <a:spcAft>
+                <a:spcPts val="288"/>
+              </a:spcAft>
+              <a:defRPr sz="1200">
+                <a:solidFill>
+                  <a:srgbClr val="191F24"/>
+                </a:solidFill>
+                <a:latin typeface="Microsoft YaHei"/>
+              </a:defRPr>
+            </a:pPr>
+            <a:r>
+              <a:t>Metric keyword: mixed-component sign gate = wrong_mixed_component_sign_count。</a:t>
+            </a:r>
+          </a:p>
+          <a:p>
+            <a:pPr>
+              <a:spcAft>
+                <a:spcPts val="288"/>
+              </a:spcAft>
+              <a:defRPr sz="1200">
+                <a:solidFill>
+                  <a:srgbClr val="191F24"/>
+                </a:solidFill>
+                <a:latin typeface="Microsoft YaHei"/>
+              </a:defRPr>
+            </a:pPr>
+            <a:r>
+              <a:t>新的问题定义：mixed vx/vy 命令必须同时满足 vx、vy 两个非零分量同号，不能只看投影方向。</a:t>
+            </a:r>
+          </a:p>
+          <a:p>
+            <a:pPr>
+              <a:spcAft>
+                <a:spcPts val="288"/>
+              </a:spcAft>
+              <a:defRPr sz="1200">
+                <a:solidFill>
+                  <a:srgbClr val="191F24"/>
+                </a:solidFill>
+                <a:latin typeface="Microsoft YaHei"/>
+              </a:defRPr>
+            </a:pPr>
+            <a:r>
+              <a:t>结论边界：V95 是诊断性进步，不是连续 vx/vy/yaw 跟踪完成版。</a:t>
+            </a:r>
+          </a:p>
+          <a:p>
+            <a:pPr>
+              <a:spcAft>
+                <a:spcPts val="288"/>
+              </a:spcAft>
+              <a:defRPr sz="1200">
+                <a:solidFill>
+                  <a:srgbClr val="191F24"/>
+                </a:solidFill>
+                <a:latin typeface="Microsoft YaHei"/>
+              </a:defRPr>
+            </a:pPr>
+            <a:r>
+              <a:t>下一步训练：奖励与选择标准直接加入 mixed-component sign 和 component magnitude，不再只优化 planar projection。</a:t>
+            </a:r>
+          </a:p>
+        </p:txBody>
+      </p:sp>
+      <p:sp>
+        <p:nvSpPr>
+          <p:cNvPr id="8" name="TextBox 7"/>
+          <p:cNvSpPr txBox="1"/>
+          <p:nvPr/>
+        </p:nvSpPr>
+        <p:spPr>
+          <a:xfrm>
+            <a:off x="685800" y="6144768"/>
+            <a:ext cx="10789920" cy="228600"/>
+          </a:xfrm>
+          <a:prstGeom prst="rect">
+            <a:avLst/>
+          </a:prstGeom>
+          <a:noFill/>
+        </p:spPr>
+        <p:txBody>
+          <a:bodyPr wrap="none">
+            <a:spAutoFit/>
+          </a:bodyPr>
+          <a:lstStyle/>
+          <a:p>
+            <a:pPr algn="l"/>
+            <a:r>
+              <a:rPr sz="800" b="0">
+                <a:solidFill>
+                  <a:srgbClr val="5D676F"/>
+                </a:solidFill>
+                <a:latin typeface="Microsoft YaHei"/>
+              </a:rPr>
+              <a:t>Scan artifacts: D:\inovxio\thirdparty\simulation\worm_project\record\current\flat_omni_v95_server_mixed_positive_vx_hardcase_scan</a:t>
+            </a:r>
+          </a:p>
+        </p:txBody>
+      </p:sp>
+    </p:spTree>
+  </p:cSld>
+  <p:clrMapOvr>
+    <a:masterClrMapping/>
+  </p:clrMapOvr>
+</p:sld>
+</file>
+
+<file path=ppt/slides/slide18.xml><?xml version="1.0" encoding="utf-8"?>
+<p:sld xmlns:a="http://schemas.openxmlformats.org/drawingml/2006/main" xmlns:p="http://schemas.openxmlformats.org/presentationml/2006/main" xmlns:r="http://schemas.openxmlformats.org/officeDocument/2006/relationships">
+  <p:cSld>
+    <p:spTree>
+      <p:nvGrpSpPr>
+        <p:cNvPr id="1" name=""/>
+        <p:cNvGrpSpPr/>
+        <p:nvPr/>
+      </p:nvGrpSpPr>
+      <p:grpSpPr/>
+      <p:sp>
+        <p:nvSpPr>
+          <p:cNvPr id="2" name="TextBox 1"/>
+          <p:cNvSpPr txBox="1"/>
+          <p:nvPr/>
+        </p:nvSpPr>
+        <p:spPr>
+          <a:xfrm>
+            <a:off x="502920" y="292608"/>
+            <a:ext cx="11064240" cy="502920"/>
+          </a:xfrm>
+          <a:prstGeom prst="rect">
+            <a:avLst/>
+          </a:prstGeom>
+          <a:noFill/>
+        </p:spPr>
+        <p:txBody>
+          <a:bodyPr wrap="none">
+            <a:spAutoFit/>
+          </a:bodyPr>
+          <a:lstStyle/>
+          <a:p>
+            <a:pPr algn="l"/>
+            <a:r>
+              <a:rPr sz="2400" b="1">
+                <a:solidFill>
+                  <a:srgbClr val="191F24"/>
+                </a:solidFill>
+                <a:latin typeface="Microsoft YaHei"/>
+              </a:rPr>
+              <a:t>已有论文怎么训练：主流路线是 gait/CPG prior + RL 调制</a:t>
+            </a:r>
+          </a:p>
+        </p:txBody>
+      </p:sp>
+      <p:sp>
+        <p:nvSpPr>
+          <p:cNvPr id="3" name="TextBox 2"/>
+          <p:cNvSpPr txBox="1"/>
+          <p:nvPr/>
+        </p:nvSpPr>
+        <p:spPr>
+          <a:xfrm>
+            <a:off x="530352" y="786384"/>
+            <a:ext cx="10698480" cy="301752"/>
+          </a:xfrm>
+          <a:prstGeom prst="rect">
+            <a:avLst/>
+          </a:prstGeom>
+          <a:noFill/>
+        </p:spPr>
+        <p:txBody>
+          <a:bodyPr wrap="none">
+            <a:spAutoFit/>
+          </a:bodyPr>
+          <a:lstStyle/>
+          <a:p>
+            <a:pPr algn="l"/>
+            <a:r>
+              <a:rPr sz="1000" b="0">
+                <a:solidFill>
+                  <a:srgbClr val="5D676F"/>
+                </a:solidFill>
+                <a:latin typeface="Microsoft YaHei"/>
+              </a:rPr>
+              <a:t>这支持我们当前的 prior + residual + learned gait gate，而不是端到端裸输出所有电机。</a:t>
+            </a:r>
+          </a:p>
+        </p:txBody>
+      </p:sp>
+      <p:sp>
+        <p:nvSpPr>
+          <p:cNvPr id="4" name="Rectangle 3"/>
+          <p:cNvSpPr/>
+          <p:nvPr/>
+        </p:nvSpPr>
+        <p:spPr>
+          <a:xfrm>
+            <a:off x="502920" y="1078992"/>
+            <a:ext cx="11155680" cy="18288"/>
+          </a:xfrm>
+          <a:prstGeom prst="rect">
+            <a:avLst/>
+          </a:prstGeom>
+          <a:solidFill>
+            <a:srgbClr val="D2D8DC"/>
+          </a:solidFill>
+          <a:ln>
+            <a:solidFill>
+              <a:srgbClr val="D2D8DC"/>
+            </a:solidFill>
+          </a:ln>
+        </p:spPr>
+        <p:style>
+          <a:lnRef idx="1">
+            <a:schemeClr val="accent1"/>
+          </a:lnRef>
+          <a:fillRef idx="3">
+            <a:schemeClr val="accent1"/>
+          </a:fillRef>
+          <a:effectRef idx="2">
+            <a:schemeClr val="accent1"/>
+          </a:effectRef>
+          <a:fontRef idx="minor">
+            <a:schemeClr val="lt1"/>
+          </a:fontRef>
+        </p:style>
+        <p:txBody>
+          <a:bodyPr rtlCol="0" anchor="ctr"/>
+          <a:lstStyle/>
+          <a:p>
+            <a:pPr algn="ctr"/>
+          </a:p>
+        </p:txBody>
+      </p:sp>
       <p:graphicFrame>
         <p:nvGraphicFramePr>
           <p:cNvPr id="5" name="Table 4"/>
@@ -8013,7 +9090,7 @@
 </p:sld>
 </file>
 
-<file path=ppt/slides/slide18.xml><?xml version="1.0" encoding="utf-8"?>
+<file path=ppt/slides/slide19.xml><?xml version="1.0" encoding="utf-8"?>
 <p:sld xmlns:a="http://schemas.openxmlformats.org/drawingml/2006/main" xmlns:p="http://schemas.openxmlformats.org/presentationml/2006/main" xmlns:r="http://schemas.openxmlformats.org/officeDocument/2006/relationships">
   <p:cSld>
     <p:spTree>
